--- a/pptx/Part 1 - Overview of Fabric CICD.pptx
+++ b/pptx/Part 1 - Overview of Fabric CICD.pptx
@@ -53,9 +53,9 @@
     <p:sldId id="2147482179" r:id="rId44"/>
     <p:sldId id="2147482216" r:id="rId45"/>
     <p:sldId id="2147482210" r:id="rId46"/>
-    <p:sldId id="2147482211" r:id="rId47"/>
-    <p:sldId id="2147482178" r:id="rId48"/>
-    <p:sldId id="2147482132" r:id="rId49"/>
+    <p:sldId id="2147482132" r:id="rId47"/>
+    <p:sldId id="2147482211" r:id="rId48"/>
+    <p:sldId id="2147482178" r:id="rId49"/>
     <p:sldId id="2147482212" r:id="rId50"/>
     <p:sldId id="2147482213" r:id="rId51"/>
     <p:sldId id="2147482147" r:id="rId52"/>
@@ -238,9 +238,9 @@
             <p14:sldId id="2147482179"/>
             <p14:sldId id="2147482216"/>
             <p14:sldId id="2147482210"/>
+            <p14:sldId id="2147482132"/>
             <p14:sldId id="2147482211"/>
             <p14:sldId id="2147482178"/>
-            <p14:sldId id="2147482132"/>
             <p14:sldId id="2147482212"/>
             <p14:sldId id="2147482213"/>
             <p14:sldId id="2147482147"/>
@@ -630,7 +630,7 @@
           <a:p>
             <a:fld id="{DCE60099-03E7-4FA1-8A7F-E6E6CFB0F855}" type="datetime8">
               <a:rPr lang="en-US" smtClean="0"/>
-              <a:t>5/11/2026 7:46 AM</a:t>
+              <a:t>5/12/2026 10:41 AM</a:t>
             </a:fld>
             <a:endParaRPr lang="en-US"/>
           </a:p>
@@ -1971,7 +1971,7 @@
             <a:fld id="{B4008EB6-D09E-4580-8CD6-DDB14511944F}" type="slidenum">
               <a:rPr lang="en-US" smtClean="0"/>
               <a:pPr/>
-              <a:t>44</a:t>
+              <a:t>42</a:t>
             </a:fld>
             <a:endParaRPr lang="en-US"/>
           </a:p>
@@ -28152,6 +28152,1045 @@
   <p:cSld>
     <p:spTree>
       <p:nvGrpSpPr>
+        <p:cNvPr id="1" name="">
+          <a:extLst>
+            <a:ext uri="{FF2B5EF4-FFF2-40B4-BE49-F238E27FC236}">
+              <a16:creationId xmlns:a16="http://schemas.microsoft.com/office/drawing/2014/main" id="{C23E18CB-5510-9995-46E5-9CAE01B415C5}"/>
+            </a:ext>
+          </a:extLst>
+        </p:cNvPr>
+        <p:cNvGrpSpPr/>
+        <p:nvPr/>
+      </p:nvGrpSpPr>
+      <p:grpSpPr>
+        <a:xfrm>
+          <a:off x="0" y="0"/>
+          <a:ext cx="0" cy="0"/>
+          <a:chOff x="0" y="0"/>
+          <a:chExt cx="0" cy="0"/>
+        </a:xfrm>
+      </p:grpSpPr>
+      <p:sp>
+        <p:nvSpPr>
+          <p:cNvPr id="12" name="Rectangle 11">
+            <a:extLst>
+              <a:ext uri="{FF2B5EF4-FFF2-40B4-BE49-F238E27FC236}">
+                <a16:creationId xmlns:a16="http://schemas.microsoft.com/office/drawing/2014/main" id="{5A8740D2-F051-D967-20A0-F49481439CFD}"/>
+              </a:ext>
+            </a:extLst>
+          </p:cNvPr>
+          <p:cNvSpPr/>
+          <p:nvPr/>
+        </p:nvSpPr>
+        <p:spPr bwMode="auto">
+          <a:xfrm>
+            <a:off x="302953" y="238998"/>
+            <a:ext cx="7560888" cy="3268423"/>
+          </a:xfrm>
+          <a:prstGeom prst="rect">
+            <a:avLst/>
+          </a:prstGeom>
+          <a:solidFill>
+            <a:schemeClr val="bg1">
+              <a:lumMod val="85000"/>
+            </a:schemeClr>
+          </a:solidFill>
+          <a:ln>
+            <a:solidFill>
+              <a:schemeClr val="tx1"/>
+            </a:solidFill>
+            <a:headEnd type="none" w="med" len="med"/>
+            <a:tailEnd type="none" w="med" len="med"/>
+          </a:ln>
+          <a:effectLst/>
+        </p:spPr>
+        <p:style>
+          <a:lnRef idx="1">
+            <a:schemeClr val="accent2"/>
+          </a:lnRef>
+          <a:fillRef idx="3">
+            <a:schemeClr val="accent2"/>
+          </a:fillRef>
+          <a:effectRef idx="2">
+            <a:schemeClr val="accent2"/>
+          </a:effectRef>
+          <a:fontRef idx="minor">
+            <a:schemeClr val="lt1"/>
+          </a:fontRef>
+        </p:style>
+        <p:txBody>
+          <a:bodyPr rot="0" spcFirstLastPara="0" vertOverflow="overflow" horzOverflow="overflow" vert="horz" wrap="square" lIns="0" tIns="0" rIns="0" bIns="0" numCol="1" spcCol="0" rtlCol="0" fromWordArt="0" anchor="ctr" anchorCtr="0" forceAA="0" compatLnSpc="1">
+            <a:prstTxWarp prst="textNoShape">
+              <a:avLst/>
+            </a:prstTxWarp>
+            <a:noAutofit/>
+          </a:bodyPr>
+          <a:lstStyle/>
+          <a:p>
+            <a:pPr algn="ctr" defTabSz="932472" fontAlgn="base">
+              <a:lnSpc>
+                <a:spcPct val="90000"/>
+              </a:lnSpc>
+              <a:spcBef>
+                <a:spcPct val="0"/>
+              </a:spcBef>
+              <a:spcAft>
+                <a:spcPct val="0"/>
+              </a:spcAft>
+            </a:pPr>
+            <a:endParaRPr lang="en-US" sz="1200" b="1" dirty="0">
+              <a:gradFill>
+                <a:gsLst>
+                  <a:gs pos="0">
+                    <a:srgbClr val="FFFFFF"/>
+                  </a:gs>
+                  <a:gs pos="100000">
+                    <a:srgbClr val="FFFFFF"/>
+                  </a:gs>
+                </a:gsLst>
+                <a:lin ang="5400000" scaled="0"/>
+              </a:gradFill>
+              <a:latin typeface="Lucida Console" panose="020B0609040504020204" pitchFamily="49" charset="0"/>
+              <a:ea typeface="Segoe UI" pitchFamily="34" charset="0"/>
+              <a:cs typeface="Segoe UI" pitchFamily="34" charset="0"/>
+            </a:endParaRPr>
+          </a:p>
+        </p:txBody>
+      </p:sp>
+      <p:sp>
+        <p:nvSpPr>
+          <p:cNvPr id="7" name="Rectangle 6">
+            <a:extLst>
+              <a:ext uri="{FF2B5EF4-FFF2-40B4-BE49-F238E27FC236}">
+                <a16:creationId xmlns:a16="http://schemas.microsoft.com/office/drawing/2014/main" id="{33EDB799-4EDC-6DA7-6DC6-63624D4C63B5}"/>
+              </a:ext>
+            </a:extLst>
+          </p:cNvPr>
+          <p:cNvSpPr/>
+          <p:nvPr/>
+        </p:nvSpPr>
+        <p:spPr bwMode="auto">
+          <a:xfrm>
+            <a:off x="401494" y="764984"/>
+            <a:ext cx="7334961" cy="1135697"/>
+          </a:xfrm>
+          <a:prstGeom prst="rect">
+            <a:avLst/>
+          </a:prstGeom>
+          <a:solidFill>
+            <a:schemeClr val="accent6">
+              <a:lumMod val="20000"/>
+              <a:lumOff val="80000"/>
+            </a:schemeClr>
+          </a:solidFill>
+          <a:ln>
+            <a:solidFill>
+              <a:schemeClr val="accent4">
+                <a:lumMod val="75000"/>
+              </a:schemeClr>
+            </a:solidFill>
+            <a:headEnd type="none" w="med" len="med"/>
+            <a:tailEnd type="none" w="med" len="med"/>
+          </a:ln>
+          <a:effectLst/>
+        </p:spPr>
+        <p:style>
+          <a:lnRef idx="1">
+            <a:schemeClr val="accent2"/>
+          </a:lnRef>
+          <a:fillRef idx="3">
+            <a:schemeClr val="accent2"/>
+          </a:fillRef>
+          <a:effectRef idx="2">
+            <a:schemeClr val="accent2"/>
+          </a:effectRef>
+          <a:fontRef idx="minor">
+            <a:schemeClr val="lt1"/>
+          </a:fontRef>
+        </p:style>
+        <p:txBody>
+          <a:bodyPr rot="0" spcFirstLastPara="0" vertOverflow="overflow" horzOverflow="overflow" vert="horz" wrap="square" lIns="0" tIns="0" rIns="0" bIns="0" numCol="1" spcCol="0" rtlCol="0" fromWordArt="0" anchor="ctr" anchorCtr="0" forceAA="0" compatLnSpc="1">
+            <a:prstTxWarp prst="textNoShape">
+              <a:avLst/>
+            </a:prstTxWarp>
+            <a:noAutofit/>
+          </a:bodyPr>
+          <a:lstStyle/>
+          <a:p>
+            <a:pPr algn="ctr" defTabSz="932472" fontAlgn="base">
+              <a:lnSpc>
+                <a:spcPct val="90000"/>
+              </a:lnSpc>
+              <a:spcBef>
+                <a:spcPct val="0"/>
+              </a:spcBef>
+              <a:spcAft>
+                <a:spcPct val="0"/>
+              </a:spcAft>
+            </a:pPr>
+            <a:endParaRPr lang="en-US" sz="1200" b="1" dirty="0">
+              <a:gradFill>
+                <a:gsLst>
+                  <a:gs pos="0">
+                    <a:srgbClr val="FFFFFF"/>
+                  </a:gs>
+                  <a:gs pos="100000">
+                    <a:srgbClr val="FFFFFF"/>
+                  </a:gs>
+                </a:gsLst>
+                <a:lin ang="5400000" scaled="0"/>
+              </a:gradFill>
+              <a:latin typeface="Lucida Console" panose="020B0609040504020204" pitchFamily="49" charset="0"/>
+              <a:ea typeface="Segoe UI" pitchFamily="34" charset="0"/>
+              <a:cs typeface="Segoe UI" pitchFamily="34" charset="0"/>
+            </a:endParaRPr>
+          </a:p>
+        </p:txBody>
+      </p:sp>
+      <p:sp>
+        <p:nvSpPr>
+          <p:cNvPr id="8" name="Rectangle 7">
+            <a:extLst>
+              <a:ext uri="{FF2B5EF4-FFF2-40B4-BE49-F238E27FC236}">
+                <a16:creationId xmlns:a16="http://schemas.microsoft.com/office/drawing/2014/main" id="{18FCE019-1553-9442-81F3-76DDBE8CABC0}"/>
+              </a:ext>
+            </a:extLst>
+          </p:cNvPr>
+          <p:cNvSpPr/>
+          <p:nvPr/>
+        </p:nvSpPr>
+        <p:spPr bwMode="auto">
+          <a:xfrm>
+            <a:off x="401494" y="351423"/>
+            <a:ext cx="7334961" cy="402111"/>
+          </a:xfrm>
+          <a:prstGeom prst="rect">
+            <a:avLst/>
+          </a:prstGeom>
+          <a:solidFill>
+            <a:schemeClr val="tx1"/>
+          </a:solidFill>
+          <a:ln>
+            <a:noFill/>
+            <a:headEnd type="none" w="med" len="med"/>
+            <a:tailEnd type="none" w="med" len="med"/>
+          </a:ln>
+          <a:effectLst/>
+        </p:spPr>
+        <p:style>
+          <a:lnRef idx="1">
+            <a:schemeClr val="accent2"/>
+          </a:lnRef>
+          <a:fillRef idx="3">
+            <a:schemeClr val="accent2"/>
+          </a:fillRef>
+          <a:effectRef idx="2">
+            <a:schemeClr val="accent2"/>
+          </a:effectRef>
+          <a:fontRef idx="minor">
+            <a:schemeClr val="lt1"/>
+          </a:fontRef>
+        </p:style>
+        <p:txBody>
+          <a:bodyPr rot="0" spcFirstLastPara="0" vertOverflow="overflow" horzOverflow="overflow" vert="horz" wrap="square" lIns="0" tIns="0" rIns="0" bIns="0" numCol="1" spcCol="0" rtlCol="0" fromWordArt="0" anchor="ctr" anchorCtr="0" forceAA="0" compatLnSpc="1">
+            <a:prstTxWarp prst="textNoShape">
+              <a:avLst/>
+            </a:prstTxWarp>
+            <a:noAutofit/>
+          </a:bodyPr>
+          <a:lstStyle/>
+          <a:p>
+            <a:pPr algn="ctr" defTabSz="932472" fontAlgn="base">
+              <a:lnSpc>
+                <a:spcPct val="90000"/>
+              </a:lnSpc>
+              <a:spcBef>
+                <a:spcPct val="0"/>
+              </a:spcBef>
+              <a:spcAft>
+                <a:spcPct val="0"/>
+              </a:spcAft>
+            </a:pPr>
+            <a:r>
+              <a:rPr lang="en-US" sz="1400" b="1" dirty="0">
+                <a:gradFill>
+                  <a:gsLst>
+                    <a:gs pos="0">
+                      <a:srgbClr val="FFFFFF"/>
+                    </a:gs>
+                    <a:gs pos="100000">
+                      <a:srgbClr val="FFFFFF"/>
+                    </a:gs>
+                  </a:gsLst>
+                  <a:lin ang="5400000" scaled="0"/>
+                </a:gradFill>
+                <a:latin typeface="Lucida Console" panose="020B0609040504020204" pitchFamily="49" charset="0"/>
+                <a:ea typeface="Segoe UI" pitchFamily="34" charset="0"/>
+                <a:cs typeface="Segoe UI" pitchFamily="34" charset="0"/>
+              </a:rPr>
+              <a:t>Fabric Deployment Pipeline</a:t>
+            </a:r>
+          </a:p>
+        </p:txBody>
+      </p:sp>
+      <p:sp>
+        <p:nvSpPr>
+          <p:cNvPr id="18" name="Arrow: Right 17">
+            <a:extLst>
+              <a:ext uri="{FF2B5EF4-FFF2-40B4-BE49-F238E27FC236}">
+                <a16:creationId xmlns:a16="http://schemas.microsoft.com/office/drawing/2014/main" id="{47363E60-D1DA-817E-3604-E073F0D14679}"/>
+              </a:ext>
+            </a:extLst>
+          </p:cNvPr>
+          <p:cNvSpPr/>
+          <p:nvPr/>
+        </p:nvSpPr>
+        <p:spPr bwMode="auto">
+          <a:xfrm>
+            <a:off x="2218741" y="1059869"/>
+            <a:ext cx="970624" cy="528569"/>
+          </a:xfrm>
+          <a:prstGeom prst="rightArrow">
+            <a:avLst>
+              <a:gd name="adj1" fmla="val 62678"/>
+              <a:gd name="adj2" fmla="val 58330"/>
+            </a:avLst>
+          </a:prstGeom>
+          <a:solidFill>
+            <a:srgbClr val="8A0000"/>
+          </a:solidFill>
+          <a:ln>
+            <a:noFill/>
+            <a:headEnd type="none" w="med" len="med"/>
+            <a:tailEnd type="none" w="med" len="med"/>
+          </a:ln>
+          <a:effectLst/>
+        </p:spPr>
+        <p:style>
+          <a:lnRef idx="1">
+            <a:schemeClr val="accent2"/>
+          </a:lnRef>
+          <a:fillRef idx="3">
+            <a:schemeClr val="accent2"/>
+          </a:fillRef>
+          <a:effectRef idx="2">
+            <a:schemeClr val="accent2"/>
+          </a:effectRef>
+          <a:fontRef idx="minor">
+            <a:schemeClr val="lt1"/>
+          </a:fontRef>
+        </p:style>
+        <p:txBody>
+          <a:bodyPr rot="0" spcFirstLastPara="0" vertOverflow="overflow" horzOverflow="overflow" vert="horz" wrap="square" lIns="0" tIns="0" rIns="0" bIns="0" numCol="1" spcCol="0" rtlCol="0" fromWordArt="0" anchor="ctr" anchorCtr="0" forceAA="0" compatLnSpc="1">
+            <a:prstTxWarp prst="textNoShape">
+              <a:avLst/>
+            </a:prstTxWarp>
+            <a:noAutofit/>
+          </a:bodyPr>
+          <a:lstStyle/>
+          <a:p>
+            <a:pPr algn="ctr" defTabSz="932472" fontAlgn="base">
+              <a:lnSpc>
+                <a:spcPct val="90000"/>
+              </a:lnSpc>
+              <a:spcBef>
+                <a:spcPct val="0"/>
+              </a:spcBef>
+              <a:spcAft>
+                <a:spcPct val="0"/>
+              </a:spcAft>
+            </a:pPr>
+            <a:r>
+              <a:rPr lang="en-US" sz="1000" b="1" dirty="0">
+                <a:gradFill>
+                  <a:gsLst>
+                    <a:gs pos="0">
+                      <a:srgbClr val="FFFFFF"/>
+                    </a:gs>
+                    <a:gs pos="100000">
+                      <a:srgbClr val="FFFFFF"/>
+                    </a:gs>
+                  </a:gsLst>
+                  <a:lin ang="5400000" scaled="0"/>
+                </a:gradFill>
+                <a:ea typeface="Segoe UI" pitchFamily="34" charset="0"/>
+                <a:cs typeface="Segoe UI" pitchFamily="34" charset="0"/>
+              </a:rPr>
+              <a:t>Deploy</a:t>
+            </a:r>
+          </a:p>
+        </p:txBody>
+      </p:sp>
+      <p:sp>
+        <p:nvSpPr>
+          <p:cNvPr id="20" name="Rectangle 19">
+            <a:extLst>
+              <a:ext uri="{FF2B5EF4-FFF2-40B4-BE49-F238E27FC236}">
+                <a16:creationId xmlns:a16="http://schemas.microsoft.com/office/drawing/2014/main" id="{8F34F188-4935-E961-0E90-6ECEA88FA0F7}"/>
+              </a:ext>
+            </a:extLst>
+          </p:cNvPr>
+          <p:cNvSpPr/>
+          <p:nvPr/>
+        </p:nvSpPr>
+        <p:spPr bwMode="auto">
+          <a:xfrm>
+            <a:off x="565725" y="2647841"/>
+            <a:ext cx="1634694" cy="747926"/>
+          </a:xfrm>
+          <a:prstGeom prst="rect">
+            <a:avLst/>
+          </a:prstGeom>
+          <a:solidFill>
+            <a:schemeClr val="accent4">
+              <a:lumMod val="75000"/>
+            </a:schemeClr>
+          </a:solidFill>
+          <a:ln>
+            <a:solidFill>
+              <a:schemeClr val="tx1">
+                <a:lumMod val="75000"/>
+              </a:schemeClr>
+            </a:solidFill>
+            <a:headEnd type="none" w="med" len="med"/>
+            <a:tailEnd type="none" w="med" len="med"/>
+          </a:ln>
+          <a:effectLst/>
+        </p:spPr>
+        <p:style>
+          <a:lnRef idx="1">
+            <a:schemeClr val="accent2"/>
+          </a:lnRef>
+          <a:fillRef idx="3">
+            <a:schemeClr val="accent2"/>
+          </a:fillRef>
+          <a:effectRef idx="2">
+            <a:schemeClr val="accent2"/>
+          </a:effectRef>
+          <a:fontRef idx="minor">
+            <a:schemeClr val="lt1"/>
+          </a:fontRef>
+        </p:style>
+        <p:txBody>
+          <a:bodyPr rot="0" spcFirstLastPara="0" vertOverflow="overflow" horzOverflow="overflow" vert="horz" wrap="square" lIns="0" tIns="0" rIns="0" bIns="0" numCol="1" spcCol="0" rtlCol="0" fromWordArt="0" anchor="ctr" anchorCtr="0" forceAA="0" compatLnSpc="1">
+            <a:prstTxWarp prst="textNoShape">
+              <a:avLst/>
+            </a:prstTxWarp>
+            <a:noAutofit/>
+          </a:bodyPr>
+          <a:lstStyle/>
+          <a:p>
+            <a:pPr algn="ctr" defTabSz="932472" fontAlgn="base">
+              <a:lnSpc>
+                <a:spcPct val="90000"/>
+              </a:lnSpc>
+              <a:spcBef>
+                <a:spcPct val="0"/>
+              </a:spcBef>
+              <a:spcAft>
+                <a:spcPct val="0"/>
+              </a:spcAft>
+            </a:pPr>
+            <a:r>
+              <a:rPr lang="en-US" sz="1200" b="1" dirty="0">
+                <a:gradFill>
+                  <a:gsLst>
+                    <a:gs pos="0">
+                      <a:srgbClr val="FFFFFF"/>
+                    </a:gs>
+                    <a:gs pos="100000">
+                      <a:srgbClr val="FFFFFF"/>
+                    </a:gs>
+                  </a:gsLst>
+                  <a:lin ang="5400000" scaled="0"/>
+                </a:gradFill>
+                <a:latin typeface="Lucida Console" panose="020B0609040504020204" pitchFamily="49" charset="0"/>
+                <a:ea typeface="Segoe UI" pitchFamily="34" charset="0"/>
+                <a:cs typeface="Segoe UI" pitchFamily="34" charset="0"/>
+              </a:rPr>
+              <a:t>main</a:t>
+            </a:r>
+          </a:p>
+          <a:p>
+            <a:pPr algn="ctr" defTabSz="932472" fontAlgn="base">
+              <a:lnSpc>
+                <a:spcPct val="90000"/>
+              </a:lnSpc>
+              <a:spcBef>
+                <a:spcPct val="0"/>
+              </a:spcBef>
+              <a:spcAft>
+                <a:spcPct val="0"/>
+              </a:spcAft>
+            </a:pPr>
+            <a:r>
+              <a:rPr lang="en-US" sz="1200" dirty="0">
+                <a:gradFill>
+                  <a:gsLst>
+                    <a:gs pos="0">
+                      <a:srgbClr val="FFFFFF"/>
+                    </a:gs>
+                    <a:gs pos="100000">
+                      <a:srgbClr val="FFFFFF"/>
+                    </a:gs>
+                  </a:gsLst>
+                  <a:lin ang="5400000" scaled="0"/>
+                </a:gradFill>
+                <a:latin typeface="Lucida Console" panose="020B0609040504020204" pitchFamily="49" charset="0"/>
+                <a:ea typeface="Segoe UI" pitchFamily="34" charset="0"/>
+                <a:cs typeface="Segoe UI" pitchFamily="34" charset="0"/>
+              </a:rPr>
+              <a:t>branch</a:t>
+            </a:r>
+          </a:p>
+        </p:txBody>
+      </p:sp>
+      <p:sp>
+        <p:nvSpPr>
+          <p:cNvPr id="24" name="Rectangle 23">
+            <a:extLst>
+              <a:ext uri="{FF2B5EF4-FFF2-40B4-BE49-F238E27FC236}">
+                <a16:creationId xmlns:a16="http://schemas.microsoft.com/office/drawing/2014/main" id="{4AB5F77E-BA4B-9C00-FCFA-9E63C98B134F}"/>
+              </a:ext>
+            </a:extLst>
+          </p:cNvPr>
+          <p:cNvSpPr/>
+          <p:nvPr/>
+        </p:nvSpPr>
+        <p:spPr bwMode="auto">
+          <a:xfrm>
+            <a:off x="565725" y="950191"/>
+            <a:ext cx="1634694" cy="747926"/>
+          </a:xfrm>
+          <a:prstGeom prst="rect">
+            <a:avLst/>
+          </a:prstGeom>
+          <a:solidFill>
+            <a:schemeClr val="bg1"/>
+          </a:solidFill>
+          <a:ln>
+            <a:solidFill>
+              <a:schemeClr val="accent4">
+                <a:lumMod val="50000"/>
+              </a:schemeClr>
+            </a:solidFill>
+            <a:headEnd type="none" w="med" len="med"/>
+            <a:tailEnd type="none" w="med" len="med"/>
+          </a:ln>
+          <a:effectLst/>
+        </p:spPr>
+        <p:style>
+          <a:lnRef idx="1">
+            <a:schemeClr val="accent2"/>
+          </a:lnRef>
+          <a:fillRef idx="3">
+            <a:schemeClr val="accent2"/>
+          </a:fillRef>
+          <a:effectRef idx="2">
+            <a:schemeClr val="accent2"/>
+          </a:effectRef>
+          <a:fontRef idx="minor">
+            <a:schemeClr val="lt1"/>
+          </a:fontRef>
+        </p:style>
+        <p:txBody>
+          <a:bodyPr rot="0" spcFirstLastPara="0" vertOverflow="overflow" horzOverflow="overflow" vert="horz" wrap="square" lIns="0" tIns="0" rIns="0" bIns="0" numCol="1" spcCol="0" rtlCol="0" fromWordArt="0" anchor="ctr" anchorCtr="0" forceAA="0" compatLnSpc="1">
+            <a:prstTxWarp prst="textNoShape">
+              <a:avLst/>
+            </a:prstTxWarp>
+            <a:noAutofit/>
+          </a:bodyPr>
+          <a:lstStyle/>
+          <a:p>
+            <a:pPr algn="ctr" defTabSz="932472" fontAlgn="base">
+              <a:lnSpc>
+                <a:spcPct val="90000"/>
+              </a:lnSpc>
+              <a:spcBef>
+                <a:spcPct val="0"/>
+              </a:spcBef>
+              <a:spcAft>
+                <a:spcPct val="0"/>
+              </a:spcAft>
+            </a:pPr>
+            <a:r>
+              <a:rPr lang="en-US" sz="1200" b="1" dirty="0">
+                <a:solidFill>
+                  <a:schemeClr val="tx1"/>
+                </a:solidFill>
+                <a:latin typeface="Lucida Console" panose="020B0609040504020204" pitchFamily="49" charset="0"/>
+                <a:ea typeface="Segoe UI" pitchFamily="34" charset="0"/>
+                <a:cs typeface="Segoe UI" pitchFamily="34" charset="0"/>
+              </a:rPr>
+              <a:t>dev</a:t>
+            </a:r>
+          </a:p>
+          <a:p>
+            <a:pPr algn="ctr" defTabSz="932472" fontAlgn="base">
+              <a:lnSpc>
+                <a:spcPct val="90000"/>
+              </a:lnSpc>
+              <a:spcBef>
+                <a:spcPct val="0"/>
+              </a:spcBef>
+              <a:spcAft>
+                <a:spcPct val="0"/>
+              </a:spcAft>
+            </a:pPr>
+            <a:r>
+              <a:rPr lang="en-US" sz="1200" dirty="0">
+                <a:solidFill>
+                  <a:schemeClr val="tx1"/>
+                </a:solidFill>
+                <a:latin typeface="Lucida Console" panose="020B0609040504020204" pitchFamily="49" charset="0"/>
+                <a:ea typeface="Segoe UI" pitchFamily="34" charset="0"/>
+                <a:cs typeface="Segoe UI" pitchFamily="34" charset="0"/>
+              </a:rPr>
+              <a:t>workspace</a:t>
+            </a:r>
+          </a:p>
+        </p:txBody>
+      </p:sp>
+      <p:sp>
+        <p:nvSpPr>
+          <p:cNvPr id="32" name="Rectangle 31">
+            <a:extLst>
+              <a:ext uri="{FF2B5EF4-FFF2-40B4-BE49-F238E27FC236}">
+                <a16:creationId xmlns:a16="http://schemas.microsoft.com/office/drawing/2014/main" id="{52EDF43A-17A1-AD45-A408-EC37B49A34DB}"/>
+              </a:ext>
+            </a:extLst>
+          </p:cNvPr>
+          <p:cNvSpPr/>
+          <p:nvPr/>
+        </p:nvSpPr>
+        <p:spPr bwMode="auto">
+          <a:xfrm>
+            <a:off x="3212600" y="950191"/>
+            <a:ext cx="1634694" cy="747926"/>
+          </a:xfrm>
+          <a:prstGeom prst="rect">
+            <a:avLst/>
+          </a:prstGeom>
+          <a:solidFill>
+            <a:schemeClr val="bg1"/>
+          </a:solidFill>
+          <a:ln>
+            <a:solidFill>
+              <a:schemeClr val="accent4">
+                <a:lumMod val="50000"/>
+              </a:schemeClr>
+            </a:solidFill>
+            <a:headEnd type="none" w="med" len="med"/>
+            <a:tailEnd type="none" w="med" len="med"/>
+          </a:ln>
+          <a:effectLst/>
+        </p:spPr>
+        <p:style>
+          <a:lnRef idx="1">
+            <a:schemeClr val="accent2"/>
+          </a:lnRef>
+          <a:fillRef idx="3">
+            <a:schemeClr val="accent2"/>
+          </a:fillRef>
+          <a:effectRef idx="2">
+            <a:schemeClr val="accent2"/>
+          </a:effectRef>
+          <a:fontRef idx="minor">
+            <a:schemeClr val="lt1"/>
+          </a:fontRef>
+        </p:style>
+        <p:txBody>
+          <a:bodyPr rot="0" spcFirstLastPara="0" vertOverflow="overflow" horzOverflow="overflow" vert="horz" wrap="square" lIns="0" tIns="0" rIns="0" bIns="0" numCol="1" spcCol="0" rtlCol="0" fromWordArt="0" anchor="ctr" anchorCtr="0" forceAA="0" compatLnSpc="1">
+            <a:prstTxWarp prst="textNoShape">
+              <a:avLst/>
+            </a:prstTxWarp>
+            <a:noAutofit/>
+          </a:bodyPr>
+          <a:lstStyle/>
+          <a:p>
+            <a:pPr algn="ctr" defTabSz="932472" fontAlgn="base">
+              <a:lnSpc>
+                <a:spcPct val="90000"/>
+              </a:lnSpc>
+              <a:spcBef>
+                <a:spcPct val="0"/>
+              </a:spcBef>
+              <a:spcAft>
+                <a:spcPct val="0"/>
+              </a:spcAft>
+            </a:pPr>
+            <a:r>
+              <a:rPr lang="en-US" sz="1200" b="1" dirty="0">
+                <a:solidFill>
+                  <a:schemeClr val="tx1"/>
+                </a:solidFill>
+                <a:latin typeface="Lucida Console" panose="020B0609040504020204" pitchFamily="49" charset="0"/>
+                <a:ea typeface="Segoe UI" pitchFamily="34" charset="0"/>
+                <a:cs typeface="Segoe UI" pitchFamily="34" charset="0"/>
+              </a:rPr>
+              <a:t>test</a:t>
+            </a:r>
+          </a:p>
+          <a:p>
+            <a:pPr algn="ctr" defTabSz="932472" fontAlgn="base">
+              <a:lnSpc>
+                <a:spcPct val="90000"/>
+              </a:lnSpc>
+              <a:spcBef>
+                <a:spcPct val="0"/>
+              </a:spcBef>
+              <a:spcAft>
+                <a:spcPct val="0"/>
+              </a:spcAft>
+            </a:pPr>
+            <a:r>
+              <a:rPr lang="en-US" sz="1200" dirty="0">
+                <a:solidFill>
+                  <a:schemeClr val="tx1"/>
+                </a:solidFill>
+                <a:latin typeface="Lucida Console" panose="020B0609040504020204" pitchFamily="49" charset="0"/>
+                <a:ea typeface="Segoe UI" pitchFamily="34" charset="0"/>
+                <a:cs typeface="Segoe UI" pitchFamily="34" charset="0"/>
+              </a:rPr>
+              <a:t>workspace</a:t>
+            </a:r>
+          </a:p>
+        </p:txBody>
+      </p:sp>
+      <p:sp>
+        <p:nvSpPr>
+          <p:cNvPr id="38" name="Rectangle 37">
+            <a:extLst>
+              <a:ext uri="{FF2B5EF4-FFF2-40B4-BE49-F238E27FC236}">
+                <a16:creationId xmlns:a16="http://schemas.microsoft.com/office/drawing/2014/main" id="{C987B42C-D5C3-94B5-7A63-32067C41F033}"/>
+              </a:ext>
+            </a:extLst>
+          </p:cNvPr>
+          <p:cNvSpPr/>
+          <p:nvPr/>
+        </p:nvSpPr>
+        <p:spPr bwMode="auto">
+          <a:xfrm>
+            <a:off x="5859475" y="941087"/>
+            <a:ext cx="1634694" cy="747926"/>
+          </a:xfrm>
+          <a:prstGeom prst="rect">
+            <a:avLst/>
+          </a:prstGeom>
+          <a:solidFill>
+            <a:schemeClr val="bg1"/>
+          </a:solidFill>
+          <a:ln>
+            <a:solidFill>
+              <a:schemeClr val="accent4">
+                <a:lumMod val="50000"/>
+              </a:schemeClr>
+            </a:solidFill>
+            <a:headEnd type="none" w="med" len="med"/>
+            <a:tailEnd type="none" w="med" len="med"/>
+          </a:ln>
+          <a:effectLst/>
+        </p:spPr>
+        <p:style>
+          <a:lnRef idx="1">
+            <a:schemeClr val="accent2"/>
+          </a:lnRef>
+          <a:fillRef idx="3">
+            <a:schemeClr val="accent2"/>
+          </a:fillRef>
+          <a:effectRef idx="2">
+            <a:schemeClr val="accent2"/>
+          </a:effectRef>
+          <a:fontRef idx="minor">
+            <a:schemeClr val="lt1"/>
+          </a:fontRef>
+        </p:style>
+        <p:txBody>
+          <a:bodyPr rot="0" spcFirstLastPara="0" vertOverflow="overflow" horzOverflow="overflow" vert="horz" wrap="square" lIns="0" tIns="0" rIns="0" bIns="0" numCol="1" spcCol="0" rtlCol="0" fromWordArt="0" anchor="ctr" anchorCtr="0" forceAA="0" compatLnSpc="1">
+            <a:prstTxWarp prst="textNoShape">
+              <a:avLst/>
+            </a:prstTxWarp>
+            <a:noAutofit/>
+          </a:bodyPr>
+          <a:lstStyle/>
+          <a:p>
+            <a:pPr algn="ctr" defTabSz="932472" fontAlgn="base">
+              <a:lnSpc>
+                <a:spcPct val="90000"/>
+              </a:lnSpc>
+              <a:spcBef>
+                <a:spcPct val="0"/>
+              </a:spcBef>
+              <a:spcAft>
+                <a:spcPct val="0"/>
+              </a:spcAft>
+            </a:pPr>
+            <a:r>
+              <a:rPr lang="en-US" sz="1200" b="1" dirty="0">
+                <a:solidFill>
+                  <a:schemeClr val="tx1"/>
+                </a:solidFill>
+                <a:latin typeface="Lucida Console" panose="020B0609040504020204" pitchFamily="49" charset="0"/>
+                <a:ea typeface="Segoe UI" pitchFamily="34" charset="0"/>
+                <a:cs typeface="Segoe UI" pitchFamily="34" charset="0"/>
+              </a:rPr>
+              <a:t>prod</a:t>
+            </a:r>
+          </a:p>
+          <a:p>
+            <a:pPr algn="ctr" defTabSz="932472" fontAlgn="base">
+              <a:lnSpc>
+                <a:spcPct val="90000"/>
+              </a:lnSpc>
+              <a:spcBef>
+                <a:spcPct val="0"/>
+              </a:spcBef>
+              <a:spcAft>
+                <a:spcPct val="0"/>
+              </a:spcAft>
+            </a:pPr>
+            <a:r>
+              <a:rPr lang="en-US" sz="1200" dirty="0">
+                <a:solidFill>
+                  <a:schemeClr val="tx1"/>
+                </a:solidFill>
+                <a:latin typeface="Lucida Console" panose="020B0609040504020204" pitchFamily="49" charset="0"/>
+                <a:ea typeface="Segoe UI" pitchFamily="34" charset="0"/>
+                <a:cs typeface="Segoe UI" pitchFamily="34" charset="0"/>
+              </a:rPr>
+              <a:t>workspace</a:t>
+            </a:r>
+          </a:p>
+        </p:txBody>
+      </p:sp>
+      <p:sp>
+        <p:nvSpPr>
+          <p:cNvPr id="40" name="Arrow: Right 39">
+            <a:extLst>
+              <a:ext uri="{FF2B5EF4-FFF2-40B4-BE49-F238E27FC236}">
+                <a16:creationId xmlns:a16="http://schemas.microsoft.com/office/drawing/2014/main" id="{BA859621-4BBB-2D8A-D94D-AA4F3EDD56EE}"/>
+              </a:ext>
+            </a:extLst>
+          </p:cNvPr>
+          <p:cNvSpPr/>
+          <p:nvPr/>
+        </p:nvSpPr>
+        <p:spPr bwMode="auto">
+          <a:xfrm>
+            <a:off x="4870529" y="1059869"/>
+            <a:ext cx="970624" cy="528569"/>
+          </a:xfrm>
+          <a:prstGeom prst="rightArrow">
+            <a:avLst>
+              <a:gd name="adj1" fmla="val 62678"/>
+              <a:gd name="adj2" fmla="val 58330"/>
+            </a:avLst>
+          </a:prstGeom>
+          <a:solidFill>
+            <a:srgbClr val="8A0000"/>
+          </a:solidFill>
+          <a:ln>
+            <a:noFill/>
+            <a:headEnd type="none" w="med" len="med"/>
+            <a:tailEnd type="none" w="med" len="med"/>
+          </a:ln>
+          <a:effectLst/>
+        </p:spPr>
+        <p:style>
+          <a:lnRef idx="1">
+            <a:schemeClr val="accent2"/>
+          </a:lnRef>
+          <a:fillRef idx="3">
+            <a:schemeClr val="accent2"/>
+          </a:fillRef>
+          <a:effectRef idx="2">
+            <a:schemeClr val="accent2"/>
+          </a:effectRef>
+          <a:fontRef idx="minor">
+            <a:schemeClr val="lt1"/>
+          </a:fontRef>
+        </p:style>
+        <p:txBody>
+          <a:bodyPr rot="0" spcFirstLastPara="0" vertOverflow="overflow" horzOverflow="overflow" vert="horz" wrap="square" lIns="0" tIns="0" rIns="0" bIns="0" numCol="1" spcCol="0" rtlCol="0" fromWordArt="0" anchor="ctr" anchorCtr="0" forceAA="0" compatLnSpc="1">
+            <a:prstTxWarp prst="textNoShape">
+              <a:avLst/>
+            </a:prstTxWarp>
+            <a:noAutofit/>
+          </a:bodyPr>
+          <a:lstStyle/>
+          <a:p>
+            <a:pPr algn="ctr" defTabSz="932472" fontAlgn="base">
+              <a:lnSpc>
+                <a:spcPct val="90000"/>
+              </a:lnSpc>
+              <a:spcBef>
+                <a:spcPct val="0"/>
+              </a:spcBef>
+              <a:spcAft>
+                <a:spcPct val="0"/>
+              </a:spcAft>
+            </a:pPr>
+            <a:r>
+              <a:rPr lang="en-US" sz="1000" b="1" dirty="0">
+                <a:gradFill>
+                  <a:gsLst>
+                    <a:gs pos="0">
+                      <a:srgbClr val="FFFFFF"/>
+                    </a:gs>
+                    <a:gs pos="100000">
+                      <a:srgbClr val="FFFFFF"/>
+                    </a:gs>
+                  </a:gsLst>
+                  <a:lin ang="5400000" scaled="0"/>
+                </a:gradFill>
+                <a:ea typeface="Segoe UI" pitchFamily="34" charset="0"/>
+                <a:cs typeface="Segoe UI" pitchFamily="34" charset="0"/>
+              </a:rPr>
+              <a:t>Deploy</a:t>
+            </a:r>
+          </a:p>
+        </p:txBody>
+      </p:sp>
+      <p:sp>
+        <p:nvSpPr>
+          <p:cNvPr id="2" name="Arrow: Up-Down 1">
+            <a:extLst>
+              <a:ext uri="{FF2B5EF4-FFF2-40B4-BE49-F238E27FC236}">
+                <a16:creationId xmlns:a16="http://schemas.microsoft.com/office/drawing/2014/main" id="{CB9EA47A-8CCC-5979-E2BB-5A0BF89A9739}"/>
+              </a:ext>
+            </a:extLst>
+          </p:cNvPr>
+          <p:cNvSpPr/>
+          <p:nvPr/>
+        </p:nvSpPr>
+        <p:spPr bwMode="auto">
+          <a:xfrm>
+            <a:off x="1102649" y="1698117"/>
+            <a:ext cx="560846" cy="950490"/>
+          </a:xfrm>
+          <a:prstGeom prst="upDownArrow">
+            <a:avLst>
+              <a:gd name="adj1" fmla="val 67960"/>
+              <a:gd name="adj2" fmla="val 55238"/>
+            </a:avLst>
+          </a:prstGeom>
+          <a:solidFill>
+            <a:srgbClr val="8A0000"/>
+          </a:solidFill>
+          <a:ln>
+            <a:noFill/>
+            <a:headEnd type="none" w="med" len="med"/>
+            <a:tailEnd type="none" w="med" len="med"/>
+          </a:ln>
+          <a:effectLst/>
+        </p:spPr>
+        <p:style>
+          <a:lnRef idx="1">
+            <a:schemeClr val="accent2"/>
+          </a:lnRef>
+          <a:fillRef idx="3">
+            <a:schemeClr val="accent2"/>
+          </a:fillRef>
+          <a:effectRef idx="2">
+            <a:schemeClr val="accent2"/>
+          </a:effectRef>
+          <a:fontRef idx="minor">
+            <a:schemeClr val="lt1"/>
+          </a:fontRef>
+        </p:style>
+        <p:txBody>
+          <a:bodyPr rot="0" spcFirstLastPara="0" vertOverflow="overflow" horzOverflow="overflow" vert="horz" wrap="square" lIns="0" tIns="0" rIns="0" bIns="0" numCol="1" spcCol="0" rtlCol="0" fromWordArt="0" anchor="ctr" anchorCtr="0" forceAA="0" compatLnSpc="1">
+            <a:prstTxWarp prst="textNoShape">
+              <a:avLst/>
+            </a:prstTxWarp>
+            <a:noAutofit/>
+          </a:bodyPr>
+          <a:lstStyle/>
+          <a:p>
+            <a:pPr algn="ctr" defTabSz="932472" fontAlgn="base">
+              <a:lnSpc>
+                <a:spcPct val="90000"/>
+              </a:lnSpc>
+              <a:spcBef>
+                <a:spcPct val="0"/>
+              </a:spcBef>
+              <a:spcAft>
+                <a:spcPct val="0"/>
+              </a:spcAft>
+            </a:pPr>
+            <a:r>
+              <a:rPr lang="en-US" sz="1000" b="1" dirty="0">
+                <a:gradFill>
+                  <a:gsLst>
+                    <a:gs pos="0">
+                      <a:srgbClr val="FFFFFF"/>
+                    </a:gs>
+                    <a:gs pos="100000">
+                      <a:srgbClr val="FFFFFF"/>
+                    </a:gs>
+                  </a:gsLst>
+                  <a:lin ang="5400000" scaled="0"/>
+                </a:gradFill>
+                <a:ea typeface="Segoe UI" pitchFamily="34" charset="0"/>
+                <a:cs typeface="Segoe UI" pitchFamily="34" charset="0"/>
+              </a:rPr>
+              <a:t>GIT</a:t>
+            </a:r>
+          </a:p>
+          <a:p>
+            <a:pPr algn="ctr" defTabSz="932472" fontAlgn="base">
+              <a:lnSpc>
+                <a:spcPct val="90000"/>
+              </a:lnSpc>
+              <a:spcBef>
+                <a:spcPct val="0"/>
+              </a:spcBef>
+              <a:spcAft>
+                <a:spcPct val="0"/>
+              </a:spcAft>
+            </a:pPr>
+            <a:r>
+              <a:rPr lang="en-US" sz="1000" b="1" dirty="0">
+                <a:gradFill>
+                  <a:gsLst>
+                    <a:gs pos="0">
+                      <a:srgbClr val="FFFFFF"/>
+                    </a:gs>
+                    <a:gs pos="100000">
+                      <a:srgbClr val="FFFFFF"/>
+                    </a:gs>
+                  </a:gsLst>
+                  <a:lin ang="5400000" scaled="0"/>
+                </a:gradFill>
+                <a:ea typeface="Segoe UI" pitchFamily="34" charset="0"/>
+                <a:cs typeface="Segoe UI" pitchFamily="34" charset="0"/>
+              </a:rPr>
+              <a:t>sync</a:t>
+            </a:r>
+          </a:p>
+        </p:txBody>
+      </p:sp>
+    </p:spTree>
+    <p:extLst>
+      <p:ext uri="{BB962C8B-B14F-4D97-AF65-F5344CB8AC3E}">
+        <p14:creationId xmlns:p14="http://schemas.microsoft.com/office/powerpoint/2010/main" val="4035362271"/>
+      </p:ext>
+    </p:extLst>
+  </p:cSld>
+  <p:clrMapOvr>
+    <a:masterClrMapping/>
+  </p:clrMapOvr>
+  <p:transition>
+    <p:fade/>
+  </p:transition>
+</p:sld>
+</file>
+
+<file path=ppt/slides/slide43.xml><?xml version="1.0" encoding="utf-8"?>
+<p:sld xmlns:a="http://schemas.openxmlformats.org/drawingml/2006/main" xmlns:r="http://schemas.openxmlformats.org/officeDocument/2006/relationships" xmlns:p="http://schemas.openxmlformats.org/presentationml/2006/main">
+  <p:cSld>
+    <p:spTree>
+      <p:nvGrpSpPr>
         <p:cNvPr id="1" name=""/>
         <p:cNvGrpSpPr/>
         <p:nvPr/>
@@ -29492,7 +30531,7 @@
 </p:sld>
 </file>
 
-<file path=ppt/slides/slide43.xml><?xml version="1.0" encoding="utf-8"?>
+<file path=ppt/slides/slide44.xml><?xml version="1.0" encoding="utf-8"?>
 <p:sld xmlns:a="http://schemas.openxmlformats.org/drawingml/2006/main" xmlns:r="http://schemas.openxmlformats.org/officeDocument/2006/relationships" xmlns:p="http://schemas.openxmlformats.org/presentationml/2006/main">
   <p:cSld>
     <p:spTree>
@@ -30029,1045 +31068,6 @@
     <p:extLst>
       <p:ext uri="{BB962C8B-B14F-4D97-AF65-F5344CB8AC3E}">
         <p14:creationId xmlns:p14="http://schemas.microsoft.com/office/powerpoint/2010/main" val="2648239690"/>
-      </p:ext>
-    </p:extLst>
-  </p:cSld>
-  <p:clrMapOvr>
-    <a:masterClrMapping/>
-  </p:clrMapOvr>
-  <p:transition>
-    <p:fade/>
-  </p:transition>
-</p:sld>
-</file>
-
-<file path=ppt/slides/slide44.xml><?xml version="1.0" encoding="utf-8"?>
-<p:sld xmlns:a="http://schemas.openxmlformats.org/drawingml/2006/main" xmlns:r="http://schemas.openxmlformats.org/officeDocument/2006/relationships" xmlns:p="http://schemas.openxmlformats.org/presentationml/2006/main">
-  <p:cSld>
-    <p:spTree>
-      <p:nvGrpSpPr>
-        <p:cNvPr id="1" name="">
-          <a:extLst>
-            <a:ext uri="{FF2B5EF4-FFF2-40B4-BE49-F238E27FC236}">
-              <a16:creationId xmlns:a16="http://schemas.microsoft.com/office/drawing/2014/main" id="{C23E18CB-5510-9995-46E5-9CAE01B415C5}"/>
-            </a:ext>
-          </a:extLst>
-        </p:cNvPr>
-        <p:cNvGrpSpPr/>
-        <p:nvPr/>
-      </p:nvGrpSpPr>
-      <p:grpSpPr>
-        <a:xfrm>
-          <a:off x="0" y="0"/>
-          <a:ext cx="0" cy="0"/>
-          <a:chOff x="0" y="0"/>
-          <a:chExt cx="0" cy="0"/>
-        </a:xfrm>
-      </p:grpSpPr>
-      <p:sp>
-        <p:nvSpPr>
-          <p:cNvPr id="12" name="Rectangle 11">
-            <a:extLst>
-              <a:ext uri="{FF2B5EF4-FFF2-40B4-BE49-F238E27FC236}">
-                <a16:creationId xmlns:a16="http://schemas.microsoft.com/office/drawing/2014/main" id="{5A8740D2-F051-D967-20A0-F49481439CFD}"/>
-              </a:ext>
-            </a:extLst>
-          </p:cNvPr>
-          <p:cNvSpPr/>
-          <p:nvPr/>
-        </p:nvSpPr>
-        <p:spPr bwMode="auto">
-          <a:xfrm>
-            <a:off x="262312" y="228839"/>
-            <a:ext cx="7687369" cy="3111520"/>
-          </a:xfrm>
-          <a:prstGeom prst="rect">
-            <a:avLst/>
-          </a:prstGeom>
-          <a:solidFill>
-            <a:schemeClr val="bg1">
-              <a:lumMod val="85000"/>
-            </a:schemeClr>
-          </a:solidFill>
-          <a:ln>
-            <a:solidFill>
-              <a:schemeClr val="tx1"/>
-            </a:solidFill>
-            <a:headEnd type="none" w="med" len="med"/>
-            <a:tailEnd type="none" w="med" len="med"/>
-          </a:ln>
-          <a:effectLst/>
-        </p:spPr>
-        <p:style>
-          <a:lnRef idx="1">
-            <a:schemeClr val="accent2"/>
-          </a:lnRef>
-          <a:fillRef idx="3">
-            <a:schemeClr val="accent2"/>
-          </a:fillRef>
-          <a:effectRef idx="2">
-            <a:schemeClr val="accent2"/>
-          </a:effectRef>
-          <a:fontRef idx="minor">
-            <a:schemeClr val="lt1"/>
-          </a:fontRef>
-        </p:style>
-        <p:txBody>
-          <a:bodyPr rot="0" spcFirstLastPara="0" vertOverflow="overflow" horzOverflow="overflow" vert="horz" wrap="square" lIns="0" tIns="0" rIns="0" bIns="0" numCol="1" spcCol="0" rtlCol="0" fromWordArt="0" anchor="ctr" anchorCtr="0" forceAA="0" compatLnSpc="1">
-            <a:prstTxWarp prst="textNoShape">
-              <a:avLst/>
-            </a:prstTxWarp>
-            <a:noAutofit/>
-          </a:bodyPr>
-          <a:lstStyle/>
-          <a:p>
-            <a:pPr algn="ctr" defTabSz="932472" fontAlgn="base">
-              <a:lnSpc>
-                <a:spcPct val="90000"/>
-              </a:lnSpc>
-              <a:spcBef>
-                <a:spcPct val="0"/>
-              </a:spcBef>
-              <a:spcAft>
-                <a:spcPct val="0"/>
-              </a:spcAft>
-            </a:pPr>
-            <a:endParaRPr lang="en-US" sz="1200" b="1" dirty="0">
-              <a:gradFill>
-                <a:gsLst>
-                  <a:gs pos="0">
-                    <a:srgbClr val="FFFFFF"/>
-                  </a:gs>
-                  <a:gs pos="100000">
-                    <a:srgbClr val="FFFFFF"/>
-                  </a:gs>
-                </a:gsLst>
-                <a:lin ang="5400000" scaled="0"/>
-              </a:gradFill>
-              <a:latin typeface="Lucida Console" panose="020B0609040504020204" pitchFamily="49" charset="0"/>
-              <a:ea typeface="Segoe UI" pitchFamily="34" charset="0"/>
-              <a:cs typeface="Segoe UI" pitchFamily="34" charset="0"/>
-            </a:endParaRPr>
-          </a:p>
-        </p:txBody>
-      </p:sp>
-      <p:sp>
-        <p:nvSpPr>
-          <p:cNvPr id="7" name="Rectangle 6">
-            <a:extLst>
-              <a:ext uri="{FF2B5EF4-FFF2-40B4-BE49-F238E27FC236}">
-                <a16:creationId xmlns:a16="http://schemas.microsoft.com/office/drawing/2014/main" id="{33EDB799-4EDC-6DA7-6DC6-63624D4C63B5}"/>
-              </a:ext>
-            </a:extLst>
-          </p:cNvPr>
-          <p:cNvSpPr/>
-          <p:nvPr/>
-        </p:nvSpPr>
-        <p:spPr bwMode="auto">
-          <a:xfrm>
-            <a:off x="401494" y="764984"/>
-            <a:ext cx="7334961" cy="1185114"/>
-          </a:xfrm>
-          <a:prstGeom prst="rect">
-            <a:avLst/>
-          </a:prstGeom>
-          <a:solidFill>
-            <a:schemeClr val="accent6">
-              <a:lumMod val="20000"/>
-              <a:lumOff val="80000"/>
-            </a:schemeClr>
-          </a:solidFill>
-          <a:ln>
-            <a:solidFill>
-              <a:schemeClr val="accent4">
-                <a:lumMod val="75000"/>
-              </a:schemeClr>
-            </a:solidFill>
-            <a:headEnd type="none" w="med" len="med"/>
-            <a:tailEnd type="none" w="med" len="med"/>
-          </a:ln>
-          <a:effectLst/>
-        </p:spPr>
-        <p:style>
-          <a:lnRef idx="1">
-            <a:schemeClr val="accent2"/>
-          </a:lnRef>
-          <a:fillRef idx="3">
-            <a:schemeClr val="accent2"/>
-          </a:fillRef>
-          <a:effectRef idx="2">
-            <a:schemeClr val="accent2"/>
-          </a:effectRef>
-          <a:fontRef idx="minor">
-            <a:schemeClr val="lt1"/>
-          </a:fontRef>
-        </p:style>
-        <p:txBody>
-          <a:bodyPr rot="0" spcFirstLastPara="0" vertOverflow="overflow" horzOverflow="overflow" vert="horz" wrap="square" lIns="0" tIns="0" rIns="0" bIns="0" numCol="1" spcCol="0" rtlCol="0" fromWordArt="0" anchor="ctr" anchorCtr="0" forceAA="0" compatLnSpc="1">
-            <a:prstTxWarp prst="textNoShape">
-              <a:avLst/>
-            </a:prstTxWarp>
-            <a:noAutofit/>
-          </a:bodyPr>
-          <a:lstStyle/>
-          <a:p>
-            <a:pPr algn="ctr" defTabSz="932472" fontAlgn="base">
-              <a:lnSpc>
-                <a:spcPct val="90000"/>
-              </a:lnSpc>
-              <a:spcBef>
-                <a:spcPct val="0"/>
-              </a:spcBef>
-              <a:spcAft>
-                <a:spcPct val="0"/>
-              </a:spcAft>
-            </a:pPr>
-            <a:endParaRPr lang="en-US" sz="1200" b="1" dirty="0">
-              <a:gradFill>
-                <a:gsLst>
-                  <a:gs pos="0">
-                    <a:srgbClr val="FFFFFF"/>
-                  </a:gs>
-                  <a:gs pos="100000">
-                    <a:srgbClr val="FFFFFF"/>
-                  </a:gs>
-                </a:gsLst>
-                <a:lin ang="5400000" scaled="0"/>
-              </a:gradFill>
-              <a:latin typeface="Lucida Console" panose="020B0609040504020204" pitchFamily="49" charset="0"/>
-              <a:ea typeface="Segoe UI" pitchFamily="34" charset="0"/>
-              <a:cs typeface="Segoe UI" pitchFamily="34" charset="0"/>
-            </a:endParaRPr>
-          </a:p>
-        </p:txBody>
-      </p:sp>
-      <p:sp>
-        <p:nvSpPr>
-          <p:cNvPr id="8" name="Rectangle 7">
-            <a:extLst>
-              <a:ext uri="{FF2B5EF4-FFF2-40B4-BE49-F238E27FC236}">
-                <a16:creationId xmlns:a16="http://schemas.microsoft.com/office/drawing/2014/main" id="{18FCE019-1553-9442-81F3-76DDBE8CABC0}"/>
-              </a:ext>
-            </a:extLst>
-          </p:cNvPr>
-          <p:cNvSpPr/>
-          <p:nvPr/>
-        </p:nvSpPr>
-        <p:spPr bwMode="auto">
-          <a:xfrm>
-            <a:off x="401494" y="351423"/>
-            <a:ext cx="7334961" cy="402111"/>
-          </a:xfrm>
-          <a:prstGeom prst="rect">
-            <a:avLst/>
-          </a:prstGeom>
-          <a:solidFill>
-            <a:schemeClr val="tx1"/>
-          </a:solidFill>
-          <a:ln>
-            <a:noFill/>
-            <a:headEnd type="none" w="med" len="med"/>
-            <a:tailEnd type="none" w="med" len="med"/>
-          </a:ln>
-          <a:effectLst/>
-        </p:spPr>
-        <p:style>
-          <a:lnRef idx="1">
-            <a:schemeClr val="accent2"/>
-          </a:lnRef>
-          <a:fillRef idx="3">
-            <a:schemeClr val="accent2"/>
-          </a:fillRef>
-          <a:effectRef idx="2">
-            <a:schemeClr val="accent2"/>
-          </a:effectRef>
-          <a:fontRef idx="minor">
-            <a:schemeClr val="lt1"/>
-          </a:fontRef>
-        </p:style>
-        <p:txBody>
-          <a:bodyPr rot="0" spcFirstLastPara="0" vertOverflow="overflow" horzOverflow="overflow" vert="horz" wrap="square" lIns="0" tIns="0" rIns="0" bIns="0" numCol="1" spcCol="0" rtlCol="0" fromWordArt="0" anchor="ctr" anchorCtr="0" forceAA="0" compatLnSpc="1">
-            <a:prstTxWarp prst="textNoShape">
-              <a:avLst/>
-            </a:prstTxWarp>
-            <a:noAutofit/>
-          </a:bodyPr>
-          <a:lstStyle/>
-          <a:p>
-            <a:pPr algn="ctr" defTabSz="932472" fontAlgn="base">
-              <a:lnSpc>
-                <a:spcPct val="90000"/>
-              </a:lnSpc>
-              <a:spcBef>
-                <a:spcPct val="0"/>
-              </a:spcBef>
-              <a:spcAft>
-                <a:spcPct val="0"/>
-              </a:spcAft>
-            </a:pPr>
-            <a:r>
-              <a:rPr lang="en-US" sz="1400" b="1" dirty="0">
-                <a:gradFill>
-                  <a:gsLst>
-                    <a:gs pos="0">
-                      <a:srgbClr val="FFFFFF"/>
-                    </a:gs>
-                    <a:gs pos="100000">
-                      <a:srgbClr val="FFFFFF"/>
-                    </a:gs>
-                  </a:gsLst>
-                  <a:lin ang="5400000" scaled="0"/>
-                </a:gradFill>
-                <a:latin typeface="Lucida Console" panose="020B0609040504020204" pitchFamily="49" charset="0"/>
-                <a:ea typeface="Segoe UI" pitchFamily="34" charset="0"/>
-                <a:cs typeface="Segoe UI" pitchFamily="34" charset="0"/>
-              </a:rPr>
-              <a:t>Fabric Deployment Pipeline</a:t>
-            </a:r>
-          </a:p>
-        </p:txBody>
-      </p:sp>
-      <p:sp>
-        <p:nvSpPr>
-          <p:cNvPr id="18" name="Arrow: Right 17">
-            <a:extLst>
-              <a:ext uri="{FF2B5EF4-FFF2-40B4-BE49-F238E27FC236}">
-                <a16:creationId xmlns:a16="http://schemas.microsoft.com/office/drawing/2014/main" id="{47363E60-D1DA-817E-3604-E073F0D14679}"/>
-              </a:ext>
-            </a:extLst>
-          </p:cNvPr>
-          <p:cNvSpPr/>
-          <p:nvPr/>
-        </p:nvSpPr>
-        <p:spPr bwMode="auto">
-          <a:xfrm>
-            <a:off x="2218741" y="1059869"/>
-            <a:ext cx="970624" cy="528569"/>
-          </a:xfrm>
-          <a:prstGeom prst="rightArrow">
-            <a:avLst>
-              <a:gd name="adj1" fmla="val 62678"/>
-              <a:gd name="adj2" fmla="val 58330"/>
-            </a:avLst>
-          </a:prstGeom>
-          <a:solidFill>
-            <a:srgbClr val="8A0000"/>
-          </a:solidFill>
-          <a:ln>
-            <a:noFill/>
-            <a:headEnd type="none" w="med" len="med"/>
-            <a:tailEnd type="none" w="med" len="med"/>
-          </a:ln>
-          <a:effectLst/>
-        </p:spPr>
-        <p:style>
-          <a:lnRef idx="1">
-            <a:schemeClr val="accent2"/>
-          </a:lnRef>
-          <a:fillRef idx="3">
-            <a:schemeClr val="accent2"/>
-          </a:fillRef>
-          <a:effectRef idx="2">
-            <a:schemeClr val="accent2"/>
-          </a:effectRef>
-          <a:fontRef idx="minor">
-            <a:schemeClr val="lt1"/>
-          </a:fontRef>
-        </p:style>
-        <p:txBody>
-          <a:bodyPr rot="0" spcFirstLastPara="0" vertOverflow="overflow" horzOverflow="overflow" vert="horz" wrap="square" lIns="0" tIns="0" rIns="0" bIns="0" numCol="1" spcCol="0" rtlCol="0" fromWordArt="0" anchor="ctr" anchorCtr="0" forceAA="0" compatLnSpc="1">
-            <a:prstTxWarp prst="textNoShape">
-              <a:avLst/>
-            </a:prstTxWarp>
-            <a:noAutofit/>
-          </a:bodyPr>
-          <a:lstStyle/>
-          <a:p>
-            <a:pPr algn="ctr" defTabSz="932472" fontAlgn="base">
-              <a:lnSpc>
-                <a:spcPct val="90000"/>
-              </a:lnSpc>
-              <a:spcBef>
-                <a:spcPct val="0"/>
-              </a:spcBef>
-              <a:spcAft>
-                <a:spcPct val="0"/>
-              </a:spcAft>
-            </a:pPr>
-            <a:r>
-              <a:rPr lang="en-US" sz="1000" b="1" dirty="0">
-                <a:gradFill>
-                  <a:gsLst>
-                    <a:gs pos="0">
-                      <a:srgbClr val="FFFFFF"/>
-                    </a:gs>
-                    <a:gs pos="100000">
-                      <a:srgbClr val="FFFFFF"/>
-                    </a:gs>
-                  </a:gsLst>
-                  <a:lin ang="5400000" scaled="0"/>
-                </a:gradFill>
-                <a:ea typeface="Segoe UI" pitchFamily="34" charset="0"/>
-                <a:cs typeface="Segoe UI" pitchFamily="34" charset="0"/>
-              </a:rPr>
-              <a:t>Deploy</a:t>
-            </a:r>
-          </a:p>
-        </p:txBody>
-      </p:sp>
-      <p:sp>
-        <p:nvSpPr>
-          <p:cNvPr id="20" name="Rectangle 19">
-            <a:extLst>
-              <a:ext uri="{FF2B5EF4-FFF2-40B4-BE49-F238E27FC236}">
-                <a16:creationId xmlns:a16="http://schemas.microsoft.com/office/drawing/2014/main" id="{8F34F188-4935-E961-0E90-6ECEA88FA0F7}"/>
-              </a:ext>
-            </a:extLst>
-          </p:cNvPr>
-          <p:cNvSpPr/>
-          <p:nvPr/>
-        </p:nvSpPr>
-        <p:spPr bwMode="auto">
-          <a:xfrm>
-            <a:off x="565725" y="2446043"/>
-            <a:ext cx="1634694" cy="747926"/>
-          </a:xfrm>
-          <a:prstGeom prst="rect">
-            <a:avLst/>
-          </a:prstGeom>
-          <a:solidFill>
-            <a:schemeClr val="accent4">
-              <a:lumMod val="75000"/>
-            </a:schemeClr>
-          </a:solidFill>
-          <a:ln>
-            <a:solidFill>
-              <a:schemeClr val="tx1">
-                <a:lumMod val="75000"/>
-              </a:schemeClr>
-            </a:solidFill>
-            <a:headEnd type="none" w="med" len="med"/>
-            <a:tailEnd type="none" w="med" len="med"/>
-          </a:ln>
-          <a:effectLst/>
-        </p:spPr>
-        <p:style>
-          <a:lnRef idx="1">
-            <a:schemeClr val="accent2"/>
-          </a:lnRef>
-          <a:fillRef idx="3">
-            <a:schemeClr val="accent2"/>
-          </a:fillRef>
-          <a:effectRef idx="2">
-            <a:schemeClr val="accent2"/>
-          </a:effectRef>
-          <a:fontRef idx="minor">
-            <a:schemeClr val="lt1"/>
-          </a:fontRef>
-        </p:style>
-        <p:txBody>
-          <a:bodyPr rot="0" spcFirstLastPara="0" vertOverflow="overflow" horzOverflow="overflow" vert="horz" wrap="square" lIns="0" tIns="0" rIns="0" bIns="0" numCol="1" spcCol="0" rtlCol="0" fromWordArt="0" anchor="ctr" anchorCtr="0" forceAA="0" compatLnSpc="1">
-            <a:prstTxWarp prst="textNoShape">
-              <a:avLst/>
-            </a:prstTxWarp>
-            <a:noAutofit/>
-          </a:bodyPr>
-          <a:lstStyle/>
-          <a:p>
-            <a:pPr algn="ctr" defTabSz="932472" fontAlgn="base">
-              <a:lnSpc>
-                <a:spcPct val="90000"/>
-              </a:lnSpc>
-              <a:spcBef>
-                <a:spcPct val="0"/>
-              </a:spcBef>
-              <a:spcAft>
-                <a:spcPct val="0"/>
-              </a:spcAft>
-            </a:pPr>
-            <a:r>
-              <a:rPr lang="en-US" sz="1200" b="1" dirty="0">
-                <a:gradFill>
-                  <a:gsLst>
-                    <a:gs pos="0">
-                      <a:srgbClr val="FFFFFF"/>
-                    </a:gs>
-                    <a:gs pos="100000">
-                      <a:srgbClr val="FFFFFF"/>
-                    </a:gs>
-                  </a:gsLst>
-                  <a:lin ang="5400000" scaled="0"/>
-                </a:gradFill>
-                <a:latin typeface="Lucida Console" panose="020B0609040504020204" pitchFamily="49" charset="0"/>
-                <a:ea typeface="Segoe UI" pitchFamily="34" charset="0"/>
-                <a:cs typeface="Segoe UI" pitchFamily="34" charset="0"/>
-              </a:rPr>
-              <a:t>main</a:t>
-            </a:r>
-          </a:p>
-          <a:p>
-            <a:pPr algn="ctr" defTabSz="932472" fontAlgn="base">
-              <a:lnSpc>
-                <a:spcPct val="90000"/>
-              </a:lnSpc>
-              <a:spcBef>
-                <a:spcPct val="0"/>
-              </a:spcBef>
-              <a:spcAft>
-                <a:spcPct val="0"/>
-              </a:spcAft>
-            </a:pPr>
-            <a:r>
-              <a:rPr lang="en-US" sz="1200" dirty="0">
-                <a:gradFill>
-                  <a:gsLst>
-                    <a:gs pos="0">
-                      <a:srgbClr val="FFFFFF"/>
-                    </a:gs>
-                    <a:gs pos="100000">
-                      <a:srgbClr val="FFFFFF"/>
-                    </a:gs>
-                  </a:gsLst>
-                  <a:lin ang="5400000" scaled="0"/>
-                </a:gradFill>
-                <a:latin typeface="Lucida Console" panose="020B0609040504020204" pitchFamily="49" charset="0"/>
-                <a:ea typeface="Segoe UI" pitchFamily="34" charset="0"/>
-                <a:cs typeface="Segoe UI" pitchFamily="34" charset="0"/>
-              </a:rPr>
-              <a:t>branch</a:t>
-            </a:r>
-          </a:p>
-        </p:txBody>
-      </p:sp>
-      <p:sp>
-        <p:nvSpPr>
-          <p:cNvPr id="22" name="Arrow: Up 21">
-            <a:extLst>
-              <a:ext uri="{FF2B5EF4-FFF2-40B4-BE49-F238E27FC236}">
-                <a16:creationId xmlns:a16="http://schemas.microsoft.com/office/drawing/2014/main" id="{14605D33-EB7E-0B88-CEA3-DFCCAF3FFE6D}"/>
-              </a:ext>
-            </a:extLst>
-          </p:cNvPr>
-          <p:cNvSpPr/>
-          <p:nvPr/>
-        </p:nvSpPr>
-        <p:spPr bwMode="auto">
-          <a:xfrm>
-            <a:off x="1020965" y="1698117"/>
-            <a:ext cx="721255" cy="747926"/>
-          </a:xfrm>
-          <a:prstGeom prst="upArrow">
-            <a:avLst>
-              <a:gd name="adj1" fmla="val 77388"/>
-              <a:gd name="adj2" fmla="val 51974"/>
-            </a:avLst>
-          </a:prstGeom>
-          <a:solidFill>
-            <a:srgbClr val="8A0000"/>
-          </a:solidFill>
-          <a:ln>
-            <a:noFill/>
-            <a:headEnd type="none" w="med" len="med"/>
-            <a:tailEnd type="none" w="med" len="med"/>
-          </a:ln>
-          <a:effectLst/>
-        </p:spPr>
-        <p:style>
-          <a:lnRef idx="1">
-            <a:schemeClr val="accent2"/>
-          </a:lnRef>
-          <a:fillRef idx="3">
-            <a:schemeClr val="accent2"/>
-          </a:fillRef>
-          <a:effectRef idx="2">
-            <a:schemeClr val="accent2"/>
-          </a:effectRef>
-          <a:fontRef idx="minor">
-            <a:schemeClr val="lt1"/>
-          </a:fontRef>
-        </p:style>
-        <p:txBody>
-          <a:bodyPr rot="0" spcFirstLastPara="0" vertOverflow="overflow" horzOverflow="overflow" vert="horz" wrap="square" lIns="0" tIns="0" rIns="0" bIns="0" numCol="1" spcCol="0" rtlCol="0" fromWordArt="0" anchor="ctr" anchorCtr="0" forceAA="0" compatLnSpc="1">
-            <a:prstTxWarp prst="textNoShape">
-              <a:avLst/>
-            </a:prstTxWarp>
-            <a:noAutofit/>
-          </a:bodyPr>
-          <a:lstStyle/>
-          <a:p>
-            <a:pPr algn="ctr" defTabSz="932472" fontAlgn="base">
-              <a:lnSpc>
-                <a:spcPct val="90000"/>
-              </a:lnSpc>
-              <a:spcBef>
-                <a:spcPct val="0"/>
-              </a:spcBef>
-              <a:spcAft>
-                <a:spcPct val="0"/>
-              </a:spcAft>
-            </a:pPr>
-            <a:r>
-              <a:rPr lang="en-US" sz="800" b="1" dirty="0">
-                <a:gradFill>
-                  <a:gsLst>
-                    <a:gs pos="0">
-                      <a:srgbClr val="FFFFFF"/>
-                    </a:gs>
-                    <a:gs pos="100000">
-                      <a:srgbClr val="FFFFFF"/>
-                    </a:gs>
-                  </a:gsLst>
-                  <a:lin ang="5400000" scaled="0"/>
-                </a:gradFill>
-                <a:ea typeface="Segoe UI" pitchFamily="34" charset="0"/>
-                <a:cs typeface="Segoe UI" pitchFamily="34" charset="0"/>
-              </a:rPr>
-              <a:t>Update</a:t>
-            </a:r>
-          </a:p>
-          <a:p>
-            <a:pPr algn="ctr" defTabSz="932472" fontAlgn="base">
-              <a:lnSpc>
-                <a:spcPct val="90000"/>
-              </a:lnSpc>
-              <a:spcBef>
-                <a:spcPct val="0"/>
-              </a:spcBef>
-              <a:spcAft>
-                <a:spcPct val="0"/>
-              </a:spcAft>
-            </a:pPr>
-            <a:r>
-              <a:rPr lang="en-US" sz="800" b="1" dirty="0">
-                <a:gradFill>
-                  <a:gsLst>
-                    <a:gs pos="0">
-                      <a:srgbClr val="FFFFFF"/>
-                    </a:gs>
-                    <a:gs pos="100000">
-                      <a:srgbClr val="FFFFFF"/>
-                    </a:gs>
-                  </a:gsLst>
-                  <a:lin ang="5400000" scaled="0"/>
-                </a:gradFill>
-                <a:ea typeface="Segoe UI" pitchFamily="34" charset="0"/>
-                <a:cs typeface="Segoe UI" pitchFamily="34" charset="0"/>
-              </a:rPr>
-              <a:t>from GIT</a:t>
-            </a:r>
-          </a:p>
-        </p:txBody>
-      </p:sp>
-      <p:sp>
-        <p:nvSpPr>
-          <p:cNvPr id="24" name="Rectangle 23">
-            <a:extLst>
-              <a:ext uri="{FF2B5EF4-FFF2-40B4-BE49-F238E27FC236}">
-                <a16:creationId xmlns:a16="http://schemas.microsoft.com/office/drawing/2014/main" id="{4AB5F77E-BA4B-9C00-FCFA-9E63C98B134F}"/>
-              </a:ext>
-            </a:extLst>
-          </p:cNvPr>
-          <p:cNvSpPr/>
-          <p:nvPr/>
-        </p:nvSpPr>
-        <p:spPr bwMode="auto">
-          <a:xfrm>
-            <a:off x="565725" y="950191"/>
-            <a:ext cx="1634694" cy="747926"/>
-          </a:xfrm>
-          <a:prstGeom prst="rect">
-            <a:avLst/>
-          </a:prstGeom>
-          <a:solidFill>
-            <a:schemeClr val="bg1"/>
-          </a:solidFill>
-          <a:ln>
-            <a:solidFill>
-              <a:schemeClr val="accent4">
-                <a:lumMod val="50000"/>
-              </a:schemeClr>
-            </a:solidFill>
-            <a:headEnd type="none" w="med" len="med"/>
-            <a:tailEnd type="none" w="med" len="med"/>
-          </a:ln>
-          <a:effectLst/>
-        </p:spPr>
-        <p:style>
-          <a:lnRef idx="1">
-            <a:schemeClr val="accent2"/>
-          </a:lnRef>
-          <a:fillRef idx="3">
-            <a:schemeClr val="accent2"/>
-          </a:fillRef>
-          <a:effectRef idx="2">
-            <a:schemeClr val="accent2"/>
-          </a:effectRef>
-          <a:fontRef idx="minor">
-            <a:schemeClr val="lt1"/>
-          </a:fontRef>
-        </p:style>
-        <p:txBody>
-          <a:bodyPr rot="0" spcFirstLastPara="0" vertOverflow="overflow" horzOverflow="overflow" vert="horz" wrap="square" lIns="0" tIns="0" rIns="0" bIns="0" numCol="1" spcCol="0" rtlCol="0" fromWordArt="0" anchor="ctr" anchorCtr="0" forceAA="0" compatLnSpc="1">
-            <a:prstTxWarp prst="textNoShape">
-              <a:avLst/>
-            </a:prstTxWarp>
-            <a:noAutofit/>
-          </a:bodyPr>
-          <a:lstStyle/>
-          <a:p>
-            <a:pPr algn="ctr" defTabSz="932472" fontAlgn="base">
-              <a:lnSpc>
-                <a:spcPct val="90000"/>
-              </a:lnSpc>
-              <a:spcBef>
-                <a:spcPct val="0"/>
-              </a:spcBef>
-              <a:spcAft>
-                <a:spcPct val="0"/>
-              </a:spcAft>
-            </a:pPr>
-            <a:r>
-              <a:rPr lang="en-US" sz="1200" b="1" dirty="0">
-                <a:solidFill>
-                  <a:schemeClr val="tx1"/>
-                </a:solidFill>
-                <a:latin typeface="Lucida Console" panose="020B0609040504020204" pitchFamily="49" charset="0"/>
-                <a:ea typeface="Segoe UI" pitchFamily="34" charset="0"/>
-                <a:cs typeface="Segoe UI" pitchFamily="34" charset="0"/>
-              </a:rPr>
-              <a:t>dev</a:t>
-            </a:r>
-          </a:p>
-          <a:p>
-            <a:pPr algn="ctr" defTabSz="932472" fontAlgn="base">
-              <a:lnSpc>
-                <a:spcPct val="90000"/>
-              </a:lnSpc>
-              <a:spcBef>
-                <a:spcPct val="0"/>
-              </a:spcBef>
-              <a:spcAft>
-                <a:spcPct val="0"/>
-              </a:spcAft>
-            </a:pPr>
-            <a:r>
-              <a:rPr lang="en-US" sz="1200" dirty="0">
-                <a:solidFill>
-                  <a:schemeClr val="tx1"/>
-                </a:solidFill>
-                <a:latin typeface="Lucida Console" panose="020B0609040504020204" pitchFamily="49" charset="0"/>
-                <a:ea typeface="Segoe UI" pitchFamily="34" charset="0"/>
-                <a:cs typeface="Segoe UI" pitchFamily="34" charset="0"/>
-              </a:rPr>
-              <a:t>workspace</a:t>
-            </a:r>
-          </a:p>
-        </p:txBody>
-      </p:sp>
-      <p:sp>
-        <p:nvSpPr>
-          <p:cNvPr id="32" name="Rectangle 31">
-            <a:extLst>
-              <a:ext uri="{FF2B5EF4-FFF2-40B4-BE49-F238E27FC236}">
-                <a16:creationId xmlns:a16="http://schemas.microsoft.com/office/drawing/2014/main" id="{52EDF43A-17A1-AD45-A408-EC37B49A34DB}"/>
-              </a:ext>
-            </a:extLst>
-          </p:cNvPr>
-          <p:cNvSpPr/>
-          <p:nvPr/>
-        </p:nvSpPr>
-        <p:spPr bwMode="auto">
-          <a:xfrm>
-            <a:off x="3212600" y="950191"/>
-            <a:ext cx="1634694" cy="747926"/>
-          </a:xfrm>
-          <a:prstGeom prst="rect">
-            <a:avLst/>
-          </a:prstGeom>
-          <a:solidFill>
-            <a:schemeClr val="bg1"/>
-          </a:solidFill>
-          <a:ln>
-            <a:solidFill>
-              <a:schemeClr val="accent4">
-                <a:lumMod val="50000"/>
-              </a:schemeClr>
-            </a:solidFill>
-            <a:headEnd type="none" w="med" len="med"/>
-            <a:tailEnd type="none" w="med" len="med"/>
-          </a:ln>
-          <a:effectLst/>
-        </p:spPr>
-        <p:style>
-          <a:lnRef idx="1">
-            <a:schemeClr val="accent2"/>
-          </a:lnRef>
-          <a:fillRef idx="3">
-            <a:schemeClr val="accent2"/>
-          </a:fillRef>
-          <a:effectRef idx="2">
-            <a:schemeClr val="accent2"/>
-          </a:effectRef>
-          <a:fontRef idx="minor">
-            <a:schemeClr val="lt1"/>
-          </a:fontRef>
-        </p:style>
-        <p:txBody>
-          <a:bodyPr rot="0" spcFirstLastPara="0" vertOverflow="overflow" horzOverflow="overflow" vert="horz" wrap="square" lIns="0" tIns="0" rIns="0" bIns="0" numCol="1" spcCol="0" rtlCol="0" fromWordArt="0" anchor="ctr" anchorCtr="0" forceAA="0" compatLnSpc="1">
-            <a:prstTxWarp prst="textNoShape">
-              <a:avLst/>
-            </a:prstTxWarp>
-            <a:noAutofit/>
-          </a:bodyPr>
-          <a:lstStyle/>
-          <a:p>
-            <a:pPr algn="ctr" defTabSz="932472" fontAlgn="base">
-              <a:lnSpc>
-                <a:spcPct val="90000"/>
-              </a:lnSpc>
-              <a:spcBef>
-                <a:spcPct val="0"/>
-              </a:spcBef>
-              <a:spcAft>
-                <a:spcPct val="0"/>
-              </a:spcAft>
-            </a:pPr>
-            <a:r>
-              <a:rPr lang="en-US" sz="1200" b="1" dirty="0">
-                <a:solidFill>
-                  <a:schemeClr val="tx1"/>
-                </a:solidFill>
-                <a:latin typeface="Lucida Console" panose="020B0609040504020204" pitchFamily="49" charset="0"/>
-                <a:ea typeface="Segoe UI" pitchFamily="34" charset="0"/>
-                <a:cs typeface="Segoe UI" pitchFamily="34" charset="0"/>
-              </a:rPr>
-              <a:t>test</a:t>
-            </a:r>
-          </a:p>
-          <a:p>
-            <a:pPr algn="ctr" defTabSz="932472" fontAlgn="base">
-              <a:lnSpc>
-                <a:spcPct val="90000"/>
-              </a:lnSpc>
-              <a:spcBef>
-                <a:spcPct val="0"/>
-              </a:spcBef>
-              <a:spcAft>
-                <a:spcPct val="0"/>
-              </a:spcAft>
-            </a:pPr>
-            <a:r>
-              <a:rPr lang="en-US" sz="1200" dirty="0">
-                <a:solidFill>
-                  <a:schemeClr val="tx1"/>
-                </a:solidFill>
-                <a:latin typeface="Lucida Console" panose="020B0609040504020204" pitchFamily="49" charset="0"/>
-                <a:ea typeface="Segoe UI" pitchFamily="34" charset="0"/>
-                <a:cs typeface="Segoe UI" pitchFamily="34" charset="0"/>
-              </a:rPr>
-              <a:t>workspace</a:t>
-            </a:r>
-          </a:p>
-        </p:txBody>
-      </p:sp>
-      <p:sp>
-        <p:nvSpPr>
-          <p:cNvPr id="38" name="Rectangle 37">
-            <a:extLst>
-              <a:ext uri="{FF2B5EF4-FFF2-40B4-BE49-F238E27FC236}">
-                <a16:creationId xmlns:a16="http://schemas.microsoft.com/office/drawing/2014/main" id="{C987B42C-D5C3-94B5-7A63-32067C41F033}"/>
-              </a:ext>
-            </a:extLst>
-          </p:cNvPr>
-          <p:cNvSpPr/>
-          <p:nvPr/>
-        </p:nvSpPr>
-        <p:spPr bwMode="auto">
-          <a:xfrm>
-            <a:off x="5859475" y="941087"/>
-            <a:ext cx="1634694" cy="747926"/>
-          </a:xfrm>
-          <a:prstGeom prst="rect">
-            <a:avLst/>
-          </a:prstGeom>
-          <a:solidFill>
-            <a:schemeClr val="bg1"/>
-          </a:solidFill>
-          <a:ln>
-            <a:solidFill>
-              <a:schemeClr val="accent4">
-                <a:lumMod val="50000"/>
-              </a:schemeClr>
-            </a:solidFill>
-            <a:headEnd type="none" w="med" len="med"/>
-            <a:tailEnd type="none" w="med" len="med"/>
-          </a:ln>
-          <a:effectLst/>
-        </p:spPr>
-        <p:style>
-          <a:lnRef idx="1">
-            <a:schemeClr val="accent2"/>
-          </a:lnRef>
-          <a:fillRef idx="3">
-            <a:schemeClr val="accent2"/>
-          </a:fillRef>
-          <a:effectRef idx="2">
-            <a:schemeClr val="accent2"/>
-          </a:effectRef>
-          <a:fontRef idx="minor">
-            <a:schemeClr val="lt1"/>
-          </a:fontRef>
-        </p:style>
-        <p:txBody>
-          <a:bodyPr rot="0" spcFirstLastPara="0" vertOverflow="overflow" horzOverflow="overflow" vert="horz" wrap="square" lIns="0" tIns="0" rIns="0" bIns="0" numCol="1" spcCol="0" rtlCol="0" fromWordArt="0" anchor="ctr" anchorCtr="0" forceAA="0" compatLnSpc="1">
-            <a:prstTxWarp prst="textNoShape">
-              <a:avLst/>
-            </a:prstTxWarp>
-            <a:noAutofit/>
-          </a:bodyPr>
-          <a:lstStyle/>
-          <a:p>
-            <a:pPr algn="ctr" defTabSz="932472" fontAlgn="base">
-              <a:lnSpc>
-                <a:spcPct val="90000"/>
-              </a:lnSpc>
-              <a:spcBef>
-                <a:spcPct val="0"/>
-              </a:spcBef>
-              <a:spcAft>
-                <a:spcPct val="0"/>
-              </a:spcAft>
-            </a:pPr>
-            <a:r>
-              <a:rPr lang="en-US" sz="1200" b="1" dirty="0">
-                <a:solidFill>
-                  <a:schemeClr val="tx1"/>
-                </a:solidFill>
-                <a:latin typeface="Lucida Console" panose="020B0609040504020204" pitchFamily="49" charset="0"/>
-                <a:ea typeface="Segoe UI" pitchFamily="34" charset="0"/>
-                <a:cs typeface="Segoe UI" pitchFamily="34" charset="0"/>
-              </a:rPr>
-              <a:t>prod</a:t>
-            </a:r>
-          </a:p>
-          <a:p>
-            <a:pPr algn="ctr" defTabSz="932472" fontAlgn="base">
-              <a:lnSpc>
-                <a:spcPct val="90000"/>
-              </a:lnSpc>
-              <a:spcBef>
-                <a:spcPct val="0"/>
-              </a:spcBef>
-              <a:spcAft>
-                <a:spcPct val="0"/>
-              </a:spcAft>
-            </a:pPr>
-            <a:r>
-              <a:rPr lang="en-US" sz="1200" dirty="0">
-                <a:solidFill>
-                  <a:schemeClr val="tx1"/>
-                </a:solidFill>
-                <a:latin typeface="Lucida Console" panose="020B0609040504020204" pitchFamily="49" charset="0"/>
-                <a:ea typeface="Segoe UI" pitchFamily="34" charset="0"/>
-                <a:cs typeface="Segoe UI" pitchFamily="34" charset="0"/>
-              </a:rPr>
-              <a:t>workspace</a:t>
-            </a:r>
-          </a:p>
-        </p:txBody>
-      </p:sp>
-      <p:sp>
-        <p:nvSpPr>
-          <p:cNvPr id="40" name="Arrow: Right 39">
-            <a:extLst>
-              <a:ext uri="{FF2B5EF4-FFF2-40B4-BE49-F238E27FC236}">
-                <a16:creationId xmlns:a16="http://schemas.microsoft.com/office/drawing/2014/main" id="{BA859621-4BBB-2D8A-D94D-AA4F3EDD56EE}"/>
-              </a:ext>
-            </a:extLst>
-          </p:cNvPr>
-          <p:cNvSpPr/>
-          <p:nvPr/>
-        </p:nvSpPr>
-        <p:spPr bwMode="auto">
-          <a:xfrm>
-            <a:off x="4870529" y="1059869"/>
-            <a:ext cx="970624" cy="528569"/>
-          </a:xfrm>
-          <a:prstGeom prst="rightArrow">
-            <a:avLst>
-              <a:gd name="adj1" fmla="val 62678"/>
-              <a:gd name="adj2" fmla="val 58330"/>
-            </a:avLst>
-          </a:prstGeom>
-          <a:solidFill>
-            <a:srgbClr val="8A0000"/>
-          </a:solidFill>
-          <a:ln>
-            <a:noFill/>
-            <a:headEnd type="none" w="med" len="med"/>
-            <a:tailEnd type="none" w="med" len="med"/>
-          </a:ln>
-          <a:effectLst/>
-        </p:spPr>
-        <p:style>
-          <a:lnRef idx="1">
-            <a:schemeClr val="accent2"/>
-          </a:lnRef>
-          <a:fillRef idx="3">
-            <a:schemeClr val="accent2"/>
-          </a:fillRef>
-          <a:effectRef idx="2">
-            <a:schemeClr val="accent2"/>
-          </a:effectRef>
-          <a:fontRef idx="minor">
-            <a:schemeClr val="lt1"/>
-          </a:fontRef>
-        </p:style>
-        <p:txBody>
-          <a:bodyPr rot="0" spcFirstLastPara="0" vertOverflow="overflow" horzOverflow="overflow" vert="horz" wrap="square" lIns="0" tIns="0" rIns="0" bIns="0" numCol="1" spcCol="0" rtlCol="0" fromWordArt="0" anchor="ctr" anchorCtr="0" forceAA="0" compatLnSpc="1">
-            <a:prstTxWarp prst="textNoShape">
-              <a:avLst/>
-            </a:prstTxWarp>
-            <a:noAutofit/>
-          </a:bodyPr>
-          <a:lstStyle/>
-          <a:p>
-            <a:pPr algn="ctr" defTabSz="932472" fontAlgn="base">
-              <a:lnSpc>
-                <a:spcPct val="90000"/>
-              </a:lnSpc>
-              <a:spcBef>
-                <a:spcPct val="0"/>
-              </a:spcBef>
-              <a:spcAft>
-                <a:spcPct val="0"/>
-              </a:spcAft>
-            </a:pPr>
-            <a:r>
-              <a:rPr lang="en-US" sz="1000" b="1" dirty="0">
-                <a:gradFill>
-                  <a:gsLst>
-                    <a:gs pos="0">
-                      <a:srgbClr val="FFFFFF"/>
-                    </a:gs>
-                    <a:gs pos="100000">
-                      <a:srgbClr val="FFFFFF"/>
-                    </a:gs>
-                  </a:gsLst>
-                  <a:lin ang="5400000" scaled="0"/>
-                </a:gradFill>
-                <a:ea typeface="Segoe UI" pitchFamily="34" charset="0"/>
-                <a:cs typeface="Segoe UI" pitchFamily="34" charset="0"/>
-              </a:rPr>
-              <a:t>Deploy</a:t>
-            </a:r>
-          </a:p>
-        </p:txBody>
-      </p:sp>
-    </p:spTree>
-    <p:extLst>
-      <p:ext uri="{BB962C8B-B14F-4D97-AF65-F5344CB8AC3E}">
-        <p14:creationId xmlns:p14="http://schemas.microsoft.com/office/powerpoint/2010/main" val="4035362271"/>
       </p:ext>
     </p:extLst>
   </p:cSld>
@@ -51056,6 +51056,15 @@
 </file>
 
 <file path=customXml/item1.xml><?xml version="1.0" encoding="utf-8"?>
+<?mso-contentType ?>
+<FormTemplates xmlns="http://schemas.microsoft.com/sharepoint/v3/contenttype/forms">
+  <Display>DocumentLibraryForm</Display>
+  <Edit>DocumentLibraryForm</Edit>
+  <New>DocumentLibraryForm</New>
+</FormTemplates>
+</file>
+
+<file path=customXml/item2.xml><?xml version="1.0" encoding="utf-8"?>
 <ct:contentTypeSchema xmlns:ct="http://schemas.microsoft.com/office/2006/metadata/contentType" xmlns:ma="http://schemas.microsoft.com/office/2006/metadata/properties/metaAttributes" ct:_="" ma:_="" ma:contentTypeName="Document" ma:contentTypeID="0x010100B63AD2D799A0384499DFA8618B2D06C3" ma:contentTypeVersion="19" ma:contentTypeDescription="Create a new document." ma:contentTypeScope="" ma:versionID="4ad8bb11041bccc4900be347311affd5">
   <xsd:schema xmlns:xsd="http://www.w3.org/2001/XMLSchema" xmlns:xs="http://www.w3.org/2001/XMLSchema" xmlns:p="http://schemas.microsoft.com/office/2006/metadata/properties" xmlns:ns1="http://schemas.microsoft.com/sharepoint/v3" xmlns:ns3="3c10a0e8-556e-4c2d-9121-1181542ea83c" xmlns:ns4="91f22b01-9196-48cc-8d58-ee179122dd75" targetNamespace="http://schemas.microsoft.com/office/2006/metadata/properties" ma:root="true" ma:fieldsID="55cc422832b79ebb748bec44d447ca3b" ns1:_="" ns3:_="" ns4:_="">
     <xsd:import namespace="http://schemas.microsoft.com/sharepoint/v3"/>
@@ -51319,7 +51328,7 @@
 </ct:contentTypeSchema>
 </file>
 
-<file path=customXml/item2.xml><?xml version="1.0" encoding="utf-8"?>
+<file path=customXml/item3.xml><?xml version="1.0" encoding="utf-8"?>
 <p:properties xmlns:p="http://schemas.microsoft.com/office/2006/metadata/properties" xmlns:xsi="http://www.w3.org/2001/XMLSchema-instance" xmlns:pc="http://schemas.microsoft.com/office/infopath/2007/PartnerControls">
   <documentManagement>
     <_ip_UnifiedCompliancePolicyUIAction xmlns="http://schemas.microsoft.com/sharepoint/v3" xsi:nil="true"/>
@@ -51329,16 +51338,15 @@
 </p:properties>
 </file>
 
-<file path=customXml/item3.xml><?xml version="1.0" encoding="utf-8"?>
-<?mso-contentType ?>
-<FormTemplates xmlns="http://schemas.microsoft.com/sharepoint/v3/contenttype/forms">
-  <Display>DocumentLibraryForm</Display>
-  <Edit>DocumentLibraryForm</Edit>
-  <New>DocumentLibraryForm</New>
-</FormTemplates>
+<file path=customXml/itemProps1.xml><?xml version="1.0" encoding="utf-8"?>
+<ds:datastoreItem xmlns:ds="http://schemas.openxmlformats.org/officeDocument/2006/customXml" ds:itemID="{758FDAC0-319D-4A54-8D8E-1D42CB1F8004}">
+  <ds:schemaRefs>
+    <ds:schemaRef ds:uri="http://schemas.microsoft.com/sharepoint/v3/contenttype/forms"/>
+  </ds:schemaRefs>
+</ds:datastoreItem>
 </file>
 
-<file path=customXml/itemProps1.xml><?xml version="1.0" encoding="utf-8"?>
+<file path=customXml/itemProps2.xml><?xml version="1.0" encoding="utf-8"?>
 <ds:datastoreItem xmlns:ds="http://schemas.openxmlformats.org/officeDocument/2006/customXml" ds:itemID="{C2411704-DA91-4A2A-81D1-00044852D0BE}">
   <ds:schemaRefs>
     <ds:schemaRef ds:uri="3c10a0e8-556e-4c2d-9121-1181542ea83c"/>
@@ -51358,7 +51366,7 @@
 </ds:datastoreItem>
 </file>
 
-<file path=customXml/itemProps2.xml><?xml version="1.0" encoding="utf-8"?>
+<file path=customXml/itemProps3.xml><?xml version="1.0" encoding="utf-8"?>
 <ds:datastoreItem xmlns:ds="http://schemas.openxmlformats.org/officeDocument/2006/customXml" ds:itemID="{F990F116-B58F-4255-B05B-DA3808E0E5C6}">
   <ds:schemaRefs>
     <ds:schemaRef ds:uri="http://schemas.openxmlformats.org/package/2006/metadata/core-properties"/>
@@ -51376,14 +51384,6 @@
 </ds:datastoreItem>
 </file>
 
-<file path=customXml/itemProps3.xml><?xml version="1.0" encoding="utf-8"?>
-<ds:datastoreItem xmlns:ds="http://schemas.openxmlformats.org/officeDocument/2006/customXml" ds:itemID="{758FDAC0-319D-4A54-8D8E-1D42CB1F8004}">
-  <ds:schemaRefs>
-    <ds:schemaRef ds:uri="http://schemas.microsoft.com/sharepoint/v3/contenttype/forms"/>
-  </ds:schemaRefs>
-</ds:datastoreItem>
-</file>
-
 <file path=docMetadata/LabelInfo.xml><?xml version="1.0" encoding="utf-8"?>
 <clbl:labelList xmlns:clbl="http://schemas.microsoft.com/office/2020/mipLabelMetadata">
   <clbl:label id="{87867195-f2b8-4ac2-b0b6-6bb73cb33afc}" enabled="1" method="Privileged" siteId="{72f988bf-86f1-41af-91ab-2d7cd011db47}" removed="0"/>
